--- a/submission/TeachOps_GOAI_初赛方案.pptx
+++ b/submission/TeachOps_GOAI_初赛方案.pptx
@@ -3922,7 +3922,7 @@
                 <a:latin typeface="微软雅黑"/>
                 <a:ea typeface="微软雅黑"/>
               </a:rPr>
-              <a:t>烟雾测试与两条链路运行进行中，live 证据以 docs/运行证据索引.md 登记为准；未跑通部分以 fixture replay / design 如实呈现。</a:t>
+              <a:t>烟雾测试（2026-08-15）与正常 / 异常两条业务流程（2026-08-16）均已 live 完成；live 证据见 docs/运行证据索引.md 第 13/14 项与 L1-L5。</a:t>
             </a:r>
           </a:p>
         </p:txBody>
@@ -5734,7 +5734,7 @@
                 <a:latin typeface="微软雅黑"/>
                 <a:ea typeface="微软雅黑"/>
               </a:rPr>
-              <a:t>design</a:t>
+              <a:t>live</a:t>
             </a:r>
           </a:p>
         </p:txBody>
@@ -6480,63 +6480,30 @@
           </a:p>
         </p:txBody>
       </p:sp>
-      <p:sp>
-        <p:nvSpPr>
-          <p:cNvPr id="20" name="Rounded Rectangle 19"/>
-          <p:cNvSpPr/>
-          <p:nvPr/>
-        </p:nvSpPr>
+      <p:pic>
+        <p:nvPicPr>
+          <p:cNvPr id="20" name="Picture 19" descr="live-05-normal-case-kickoff.png"/>
+          <p:cNvPicPr>
+            <a:picLocks noChangeAspect="1"/>
+          </p:cNvPicPr>
+          <p:nvPr/>
+        </p:nvPicPr>
+        <p:blipFill>
+          <a:blip r:embed="rId2"/>
+          <a:stretch>
+            <a:fillRect/>
+          </a:stretch>
+        </p:blipFill>
         <p:spPr>
           <a:xfrm>
             <a:off x="502920" y="4206240"/>
-            <a:ext cx="11155680" cy="1920240"/>
-          </a:xfrm>
-          <a:prstGeom prst="roundRect">
-            <a:avLst/>
-          </a:prstGeom>
-          <a:solidFill>
-            <a:srgbClr val="FAFBFC"/>
-          </a:solidFill>
-          <a:ln w="12700">
-            <a:solidFill>
-              <a:srgbClr val="C55A11"/>
-            </a:solidFill>
-            <a:prstDash val="dash"/>
-          </a:ln>
-          <a:effectLst/>
-        </p:spPr>
-        <p:style>
-          <a:lnRef idx="1">
-            <a:schemeClr val="accent1"/>
-          </a:lnRef>
-          <a:fillRef idx="3">
-            <a:schemeClr val="accent1"/>
-          </a:fillRef>
-          <a:effectRef idx="2">
-            <a:schemeClr val="accent1"/>
-          </a:effectRef>
-          <a:fontRef idx="minor">
-            <a:schemeClr val="lt1"/>
-          </a:fontRef>
-        </p:style>
-        <p:txBody>
-          <a:bodyPr rtlCol="0" anchor="ctr" wrap="square"/>
-          <a:lstStyle/>
-          <a:p>
-            <a:pPr algn="ctr"/>
-            <a:r>
-              <a:rPr sz="1250" b="1">
-                <a:solidFill>
-                  <a:srgbClr val="C55A11"/>
-                </a:solidFill>
-                <a:latin typeface="微软雅黑"/>
-                <a:ea typeface="微软雅黑"/>
-              </a:rPr>
-              <a:t>【live 截图占位】AgentTeams Team Room 协作记录 —— 步骤 9 运行后替换（当前为 design 流程图）</a:t>
-            </a:r>
-          </a:p>
-        </p:txBody>
-      </p:sp>
+            <a:ext cx="3168202" cy="1874519"/>
+          </a:xfrm>
+          <a:prstGeom prst="rect">
+            <a:avLst/>
+          </a:prstGeom>
+        </p:spPr>
+      </p:pic>
       <p:sp>
         <p:nvSpPr>
           <p:cNvPr id="21" name="TextBox 20"/>
@@ -6545,8 +6512,8 @@
         </p:nvSpPr>
         <p:spPr>
           <a:xfrm>
-            <a:off x="502920" y="6528816"/>
-            <a:ext cx="7315200" cy="274320"/>
+            <a:off x="3872290" y="4251959"/>
+            <a:ext cx="7713157" cy="1874519"/>
           </a:xfrm>
           <a:prstGeom prst="rect">
             <a:avLst/>
@@ -6565,6 +6532,48 @@
               </a:spcAft>
             </a:pPr>
             <a:r>
+              <a:rPr sz="1150" b="0">
+                <a:solidFill>
+                  <a:srgbClr val="5A6B7B"/>
+                </a:solidFill>
+                <a:latin typeface="微软雅黑"/>
+                <a:ea typeface="微软雅黑"/>
+              </a:rPr>
+              <a:t>live 截图（2026-08-16）：AgentTeams Team Room 协作记录，
+Evidence → Design → Audit 全流程由四 Agent 真实协作完成，
+产物见 demo/normal-case/live-output/。</a:t>
+            </a:r>
+          </a:p>
+        </p:txBody>
+      </p:sp>
+      <p:sp>
+        <p:nvSpPr>
+          <p:cNvPr id="22" name="TextBox 21"/>
+          <p:cNvSpPr txBox="1"/>
+          <p:nvPr/>
+        </p:nvSpPr>
+        <p:spPr>
+          <a:xfrm>
+            <a:off x="502920" y="6528816"/>
+            <a:ext cx="7315200" cy="274320"/>
+          </a:xfrm>
+          <a:prstGeom prst="rect">
+            <a:avLst/>
+          </a:prstGeom>
+          <a:noFill/>
+        </p:spPr>
+        <p:txBody>
+          <a:bodyPr wrap="square" anchor="t" lIns="0" rIns="0" tIns="0" bIns="0">
+            <a:spAutoFit/>
+          </a:bodyPr>
+          <a:lstStyle/>
+          <a:p>
+            <a:pPr algn="l">
+              <a:spcAft>
+                <a:spcPts val="400"/>
+              </a:spcAft>
+            </a:pPr>
+            <a:r>
               <a:rPr sz="900" b="0">
                 <a:solidFill>
                   <a:srgbClr val="5A6B7B"/>
@@ -6579,7 +6588,7 @@
       </p:sp>
       <p:sp>
         <p:nvSpPr>
-          <p:cNvPr id="22" name="TextBox 21"/>
+          <p:cNvPr id="23" name="TextBox 22"/>
           <p:cNvSpPr txBox="1"/>
           <p:nvPr/>
         </p:nvSpPr>
@@ -8266,7 +8275,7 @@
                 <a:latin typeface="微软雅黑"/>
                 <a:ea typeface="微软雅黑"/>
               </a:rPr>
-              <a:t>design</a:t>
+              <a:t>live</a:t>
             </a:r>
           </a:p>
         </p:txBody>
@@ -8633,63 +8642,30 @@
           </a:graphicData>
         </a:graphic>
       </p:graphicFrame>
-      <p:sp>
-        <p:nvSpPr>
-          <p:cNvPr id="7" name="Rounded Rectangle 6"/>
-          <p:cNvSpPr/>
-          <p:nvPr/>
-        </p:nvSpPr>
+      <p:pic>
+        <p:nvPicPr>
+          <p:cNvPr id="7" name="Picture 6" descr="live-04-team-worker-created.png"/>
+          <p:cNvPicPr>
+            <a:picLocks noChangeAspect="1"/>
+          </p:cNvPicPr>
+          <p:nvPr/>
+        </p:nvPicPr>
+        <p:blipFill>
+          <a:blip r:embed="rId2"/>
+          <a:stretch>
+            <a:fillRect/>
+          </a:stretch>
+        </p:blipFill>
         <p:spPr>
           <a:xfrm>
             <a:off x="502920" y="4983480"/>
-            <a:ext cx="11155680" cy="1234440"/>
-          </a:xfrm>
-          <a:prstGeom prst="roundRect">
-            <a:avLst/>
-          </a:prstGeom>
-          <a:solidFill>
-            <a:srgbClr val="FAFBFC"/>
-          </a:solidFill>
-          <a:ln w="12700">
-            <a:solidFill>
-              <a:srgbClr val="C55A11"/>
-            </a:solidFill>
-            <a:prstDash val="dash"/>
-          </a:ln>
-          <a:effectLst/>
-        </p:spPr>
-        <p:style>
-          <a:lnRef idx="1">
-            <a:schemeClr val="accent1"/>
-          </a:lnRef>
-          <a:fillRef idx="3">
-            <a:schemeClr val="accent1"/>
-          </a:fillRef>
-          <a:effectRef idx="2">
-            <a:schemeClr val="accent1"/>
-          </a:effectRef>
-          <a:fontRef idx="minor">
-            <a:schemeClr val="lt1"/>
-          </a:fontRef>
-        </p:style>
-        <p:txBody>
-          <a:bodyPr rtlCol="0" anchor="ctr" wrap="square"/>
-          <a:lstStyle/>
-          <a:p>
-            <a:pPr algn="ctr"/>
-            <a:r>
-              <a:rPr sz="1250" b="1">
-                <a:solidFill>
-                  <a:srgbClr val="C55A11"/>
-                </a:solidFill>
-                <a:latin typeface="微软雅黑"/>
-                <a:ea typeface="微软雅黑"/>
-              </a:rPr>
-              <a:t>【live 截图占位】团队配置与 Team Room 成员 —— 步骤 8 完成后替换</a:t>
-            </a:r>
-          </a:p>
-        </p:txBody>
-      </p:sp>
+            <a:ext cx="2009104" cy="1188720"/>
+          </a:xfrm>
+          <a:prstGeom prst="rect">
+            <a:avLst/>
+          </a:prstGeom>
+        </p:spPr>
+      </p:pic>
       <p:sp>
         <p:nvSpPr>
           <p:cNvPr id="8" name="TextBox 7"/>
@@ -8698,8 +8674,8 @@
         </p:nvSpPr>
         <p:spPr>
           <a:xfrm>
-            <a:off x="502920" y="6528816"/>
-            <a:ext cx="7315200" cy="274320"/>
+            <a:off x="2713192" y="5029200"/>
+            <a:ext cx="8872255" cy="1188720"/>
           </a:xfrm>
           <a:prstGeom prst="rect">
             <a:avLst/>
@@ -8718,6 +8694,47 @@
               </a:spcAft>
             </a:pPr>
             <a:r>
+              <a:rPr sz="1150" b="0">
+                <a:solidFill>
+                  <a:srgbClr val="5A6B7B"/>
+                </a:solidFill>
+                <a:latin typeface="微软雅黑"/>
+                <a:ea typeface="微软雅黑"/>
+              </a:rPr>
+              <a:t>live 截图（2026-08-15）：manager / evidence / design / audit
+四 Agent 团队配置与 Team Room 成员在线。</a:t>
+            </a:r>
+          </a:p>
+        </p:txBody>
+      </p:sp>
+      <p:sp>
+        <p:nvSpPr>
+          <p:cNvPr id="9" name="TextBox 8"/>
+          <p:cNvSpPr txBox="1"/>
+          <p:nvPr/>
+        </p:nvSpPr>
+        <p:spPr>
+          <a:xfrm>
+            <a:off x="502920" y="6528816"/>
+            <a:ext cx="7315200" cy="274320"/>
+          </a:xfrm>
+          <a:prstGeom prst="rect">
+            <a:avLst/>
+          </a:prstGeom>
+          <a:noFill/>
+        </p:spPr>
+        <p:txBody>
+          <a:bodyPr wrap="square" anchor="t" lIns="0" rIns="0" tIns="0" bIns="0">
+            <a:spAutoFit/>
+          </a:bodyPr>
+          <a:lstStyle/>
+          <a:p>
+            <a:pPr algn="l">
+              <a:spcAft>
+                <a:spcPts val="400"/>
+              </a:spcAft>
+            </a:pPr>
+            <a:r>
               <a:rPr sz="900" b="0">
                 <a:solidFill>
                   <a:srgbClr val="5A6B7B"/>
@@ -8732,7 +8749,7 @@
       </p:sp>
       <p:sp>
         <p:nvSpPr>
-          <p:cNvPr id="9" name="TextBox 8"/>
+          <p:cNvPr id="10" name="TextBox 9"/>
           <p:cNvSpPr txBox="1"/>
           <p:nvPr/>
         </p:nvSpPr>
@@ -8961,7 +8978,7 @@
                 <a:latin typeface="微软雅黑"/>
                 <a:ea typeface="微软雅黑"/>
               </a:rPr>
-              <a:t>design</a:t>
+              <a:t>live</a:t>
             </a:r>
           </a:p>
         </p:txBody>
@@ -9290,63 +9307,30 @@
           </a:p>
         </p:txBody>
       </p:sp>
-      <p:sp>
-        <p:nvSpPr>
-          <p:cNvPr id="10" name="Rounded Rectangle 9"/>
-          <p:cNvSpPr/>
-          <p:nvPr/>
-        </p:nvSpPr>
+      <p:pic>
+        <p:nvPicPr>
+          <p:cNvPr id="10" name="Picture 9" descr="live-09-missing-evidence-blocked.png"/>
+          <p:cNvPicPr>
+            <a:picLocks noChangeAspect="1"/>
+          </p:cNvPicPr>
+          <p:nvPr/>
+        </p:nvPicPr>
+        <p:blipFill>
+          <a:blip r:embed="rId2"/>
+          <a:stretch>
+            <a:fillRect/>
+          </a:stretch>
+        </p:blipFill>
         <p:spPr>
           <a:xfrm>
             <a:off x="502920" y="4800600"/>
-            <a:ext cx="11155680" cy="1371600"/>
-          </a:xfrm>
-          <a:prstGeom prst="roundRect">
-            <a:avLst/>
-          </a:prstGeom>
-          <a:solidFill>
-            <a:srgbClr val="FAFBFC"/>
-          </a:solidFill>
-          <a:ln w="12700">
-            <a:solidFill>
-              <a:srgbClr val="C55A11"/>
-            </a:solidFill>
-            <a:prstDash val="dash"/>
-          </a:ln>
-          <a:effectLst/>
-        </p:spPr>
-        <p:style>
-          <a:lnRef idx="1">
-            <a:schemeClr val="accent1"/>
-          </a:lnRef>
-          <a:fillRef idx="3">
-            <a:schemeClr val="accent1"/>
-          </a:fillRef>
-          <a:effectRef idx="2">
-            <a:schemeClr val="accent1"/>
-          </a:effectRef>
-          <a:fontRef idx="minor">
-            <a:schemeClr val="lt1"/>
-          </a:fontRef>
-        </p:style>
-        <p:txBody>
-          <a:bodyPr rtlCol="0" anchor="ctr" wrap="square"/>
-          <a:lstStyle/>
-          <a:p>
-            <a:pPr algn="ctr"/>
-            <a:r>
-              <a:rPr sz="1250" b="1">
-                <a:solidFill>
-                  <a:srgbClr val="C55A11"/>
-                </a:solidFill>
-                <a:latin typeface="微软雅黑"/>
-                <a:ea typeface="微软雅黑"/>
-              </a:rPr>
-              <a:t>【live 截图占位】BLOCKED 运行记录 —— 步骤 10 运行后替换；未跑通时引用 fixture 并如实标注</a:t>
-            </a:r>
-          </a:p>
-        </p:txBody>
-      </p:sp>
+            <a:ext cx="2240923" cy="1325880"/>
+          </a:xfrm>
+          <a:prstGeom prst="rect">
+            <a:avLst/>
+          </a:prstGeom>
+        </p:spPr>
+      </p:pic>
       <p:sp>
         <p:nvSpPr>
           <p:cNvPr id="11" name="TextBox 10"/>
@@ -9355,8 +9339,8 @@
         </p:nvSpPr>
         <p:spPr>
           <a:xfrm>
-            <a:off x="502920" y="6528816"/>
-            <a:ext cx="7315200" cy="274320"/>
+            <a:off x="2945011" y="4846320"/>
+            <a:ext cx="8640436" cy="1325880"/>
           </a:xfrm>
           <a:prstGeom prst="rect">
             <a:avLst/>
@@ -9375,6 +9359,48 @@
               </a:spcAft>
             </a:pPr>
             <a:r>
+              <a:rPr sz="1150" b="0">
+                <a:solidFill>
+                  <a:srgbClr val="5A6B7B"/>
+                </a:solidFill>
+                <a:latin typeface="微软雅黑"/>
+                <a:ea typeface="微软雅黑"/>
+              </a:rPr>
+              <a:t>live 截图（2026-08-16）：缺 curriculum-source.md 时 Evidence Agent
+返回 BLOCKED（E_INPUT_MISSING + 缺失清单），Manager 停止、
+不调用 Design/Audit；记录见 BLOCKED-record.md。</a:t>
+            </a:r>
+          </a:p>
+        </p:txBody>
+      </p:sp>
+      <p:sp>
+        <p:nvSpPr>
+          <p:cNvPr id="12" name="TextBox 11"/>
+          <p:cNvSpPr txBox="1"/>
+          <p:nvPr/>
+        </p:nvSpPr>
+        <p:spPr>
+          <a:xfrm>
+            <a:off x="502920" y="6528816"/>
+            <a:ext cx="7315200" cy="274320"/>
+          </a:xfrm>
+          <a:prstGeom prst="rect">
+            <a:avLst/>
+          </a:prstGeom>
+          <a:noFill/>
+        </p:spPr>
+        <p:txBody>
+          <a:bodyPr wrap="square" anchor="t" lIns="0" rIns="0" tIns="0" bIns="0">
+            <a:spAutoFit/>
+          </a:bodyPr>
+          <a:lstStyle/>
+          <a:p>
+            <a:pPr algn="l">
+              <a:spcAft>
+                <a:spcPts val="400"/>
+              </a:spcAft>
+            </a:pPr>
+            <a:r>
               <a:rPr sz="900" b="0">
                 <a:solidFill>
                   <a:srgbClr val="5A6B7B"/>
@@ -9389,7 +9415,7 @@
       </p:sp>
       <p:sp>
         <p:nvSpPr>
-          <p:cNvPr id="12" name="TextBox 11"/>
+          <p:cNvPr id="13" name="TextBox 12"/>
           <p:cNvSpPr txBox="1"/>
           <p:nvPr/>
         </p:nvSpPr>
